--- a/public/fun/pack/pptx/birthday/돌잔치_47_돌잡이중심_성탄절우체국.pptx
+++ b/public/fun/pack/pptx/birthday/돌잔치_47_돌잡이중심_성탄절우체국.pptx
@@ -3286,6 +3286,14 @@
 <file path=ppt/slides/slide1.xml><?xml version="1.0" encoding="utf-8"?>
 <p:sld xmlns:a="http://schemas.openxmlformats.org/drawingml/2006/main" xmlns:p="http://schemas.openxmlformats.org/presentationml/2006/main" xmlns:r="http://schemas.openxmlformats.org/officeDocument/2006/relationships">
   <p:cSld>
+    <p:bg>
+      <p:bgPr>
+        <a:solidFill>
+          <a:srgbClr val="D5F6E0"/>
+        </a:solidFill>
+        <a:effectLst/>
+      </p:bgPr>
+    </p:bg>
     <p:spTree>
       <p:nvGrpSpPr>
         <p:cNvPr id="1" name=""/>
@@ -3293,30 +3301,116 @@
         <p:nvPr/>
       </p:nvGrpSpPr>
       <p:grpSpPr/>
-      <p:pic>
-        <p:nvPicPr>
-          <p:cNvPr id="3" name="표지 그림" descr="birthday-47.jpg"/>
-          <p:cNvPicPr>
-            <a:picLocks noChangeAspect="1"/>
-          </p:cNvPicPr>
+      <p:sp>
+        <p:nvSpPr>
+          <p:cNvPr id="3" name="사진 자리"/>
+          <p:cNvSpPr/>
           <p:nvPr/>
-        </p:nvPicPr>
-        <p:blipFill>
-          <a:blip r:embed="rId2"/>
-          <a:stretch>
-            <a:fillRect/>
-          </a:stretch>
-        </p:blipFill>
-        <p:spPr>
-          <a:xfrm>
-            <a:off x="0" y="0"/>
-            <a:ext cx="12191695" cy="6858000"/>
+        </p:nvSpPr>
+        <p:spPr>
+          <a:xfrm>
+            <a:off x="7802684" y="0"/>
+            <a:ext cx="4389010" cy="6858000"/>
           </a:xfrm>
           <a:prstGeom prst="rect">
             <a:avLst/>
           </a:prstGeom>
-        </p:spPr>
-      </p:pic>
+          <a:solidFill>
+            <a:srgbClr val="ADEBC2"/>
+          </a:solidFill>
+          <a:ln>
+            <a:noFill/>
+          </a:ln>
+        </p:spPr>
+        <p:txBody>
+          <a:bodyPr rtlCol="0" anchor="ctr" wrap="square" lIns="54864" rIns="54864" tIns="27432" bIns="27432">
+            <a:noAutofit/>
+          </a:bodyPr>
+          <a:lstStyle/>
+          <a:p>
+            <a:pPr algn="ctr">
+              <a:lnSpc>
+                <a:spcPct val="100000"/>
+              </a:lnSpc>
+            </a:pPr>
+            <a:r>
+              <a:rPr sz="1400" b="0" i="0">
+                <a:solidFill>
+                  <a:srgbClr val="274932"/>
+                </a:solidFill>
+              </a:rPr>
+              <a:t>사진을 넣어 주세요</a:t>
+            </a:r>
+          </a:p>
+        </p:txBody>
+      </p:sp>
+      <p:sp>
+        <p:nvSpPr>
+          <p:cNvPr id="4" name="장식"/>
+          <p:cNvSpPr/>
+          <p:nvPr/>
+        </p:nvSpPr>
+        <p:spPr>
+          <a:xfrm>
+            <a:off x="8168435" y="365760"/>
+            <a:ext cx="3657508" cy="6126480"/>
+          </a:xfrm>
+          <a:prstGeom prst="rect">
+            <a:avLst/>
+          </a:prstGeom>
+          <a:noFill/>
+          <a:ln w="9525">
+            <a:solidFill>
+              <a:srgbClr val="26231F"/>
+            </a:solidFill>
+          </a:ln>
+        </p:spPr>
+        <p:txBody>
+          <a:bodyPr rtlCol="0" anchor="ctr"/>
+          <a:lstStyle/>
+          <a:p>
+            <a:pPr algn="ctr"/>
+          </a:p>
+        </p:txBody>
+      </p:sp>
+      <p:sp>
+        <p:nvSpPr>
+          <p:cNvPr id="5" name="라벨"/>
+          <p:cNvSpPr txBox="1"/>
+          <p:nvPr/>
+        </p:nvSpPr>
+        <p:spPr>
+          <a:xfrm>
+            <a:off x="822960" y="2148840"/>
+            <a:ext cx="5608179" cy="274320"/>
+          </a:xfrm>
+          <a:prstGeom prst="rect">
+            <a:avLst/>
+          </a:prstGeom>
+          <a:noFill/>
+        </p:spPr>
+        <p:txBody>
+          <a:bodyPr wrap="square" lIns="54864" rIns="54864" tIns="27432" bIns="27432" anchor="t">
+            <a:noAutofit/>
+          </a:bodyPr>
+          <a:lstStyle/>
+          <a:p>
+            <a:pPr algn="l">
+              <a:lnSpc>
+                <a:spcPct val="115000"/>
+              </a:lnSpc>
+            </a:pPr>
+            <a:r>
+              <a:rPr sz="1000" b="1" i="0" spc="250">
+                <a:solidFill>
+                  <a:srgbClr val="26231F"/>
+                </a:solidFill>
+              </a:rPr>
+              <a:t>FIRST BIRTHDAY</a:t>
+            </a:r>
+          </a:p>
+        </p:txBody>
+      </p:sp>
       <p:sp>
         <p:nvSpPr>
           <p:cNvPr id="2" name="Title 1"/>
@@ -3329,8 +3423,8 @@
         </p:nvSpPr>
         <p:spPr>
           <a:xfrm>
-            <a:off x="853418" y="2057400"/>
-            <a:ext cx="6095847" cy="1554480"/>
+            <a:off x="822960" y="2606040"/>
+            <a:ext cx="5608179" cy="1188720"/>
           </a:xfrm>
         </p:spPr>
         <p:txBody>
@@ -3347,7 +3441,7 @@
             <a:r>
               <a:rPr sz="4000" b="1" i="0">
                 <a:solidFill>
-                  <a:srgbClr val="183A23"/>
+                  <a:srgbClr val="26231F"/>
                 </a:solidFill>
               </a:rPr>
               <a:t>첫 번째 생일</a:t>
@@ -3357,14 +3451,14 @@
       </p:sp>
       <p:sp>
         <p:nvSpPr>
-          <p:cNvPr id="4" name="한 줄 문구"/>
+          <p:cNvPr id="6" name="한 줄 문구"/>
           <p:cNvSpPr txBox="1"/>
           <p:nvPr/>
         </p:nvSpPr>
         <p:spPr>
           <a:xfrm>
-            <a:off x="853418" y="3749039"/>
-            <a:ext cx="6095847" cy="822960"/>
+            <a:off x="822960" y="3886200"/>
+            <a:ext cx="5608179" cy="822960"/>
           </a:xfrm>
           <a:prstGeom prst="rect">
             <a:avLst/>
@@ -3383,9 +3477,9 @@
               </a:lnSpc>
             </a:pPr>
             <a:r>
-              <a:rPr sz="1700" b="0" i="1">
+              <a:rPr sz="1700" b="0" i="0">
                 <a:solidFill>
-                  <a:srgbClr val="183A23"/>
+                  <a:srgbClr val="26231F"/>
                 </a:solidFill>
               </a:rPr>
               <a:t>돌잡이는 아기 마음대로입니다</a:t>
@@ -3395,14 +3489,14 @@
       </p:sp>
       <p:sp>
         <p:nvSpPr>
-          <p:cNvPr id="5" name="안내 문구"/>
+          <p:cNvPr id="7" name="안내 문구"/>
           <p:cNvSpPr txBox="1"/>
           <p:nvPr/>
         </p:nvSpPr>
         <p:spPr>
           <a:xfrm>
-            <a:off x="853418" y="4617720"/>
-            <a:ext cx="6095847" cy="914400"/>
+            <a:off x="822960" y="4754880"/>
+            <a:ext cx="5608179" cy="914400"/>
           </a:xfrm>
           <a:prstGeom prst="rect">
             <a:avLst/>
@@ -3423,10 +3517,10 @@
             <a:r>
               <a:rPr sz="1400" b="0" i="0">
                 <a:solidFill>
-                  <a:srgbClr val="666666"/>
+                  <a:srgbClr val="26231F"/>
                 </a:solidFill>
               </a:rPr>
-              <a:t>아기 이름 · 2027. 00. 00</a:t>
+              <a:t>아기 이름 · 날짜 입력</a:t>
             </a:r>
           </a:p>
           <a:p>
@@ -3438,7 +3532,7 @@
             <a:r>
               <a:rPr sz="1400" b="0" i="0">
                 <a:solidFill>
-                  <a:srgbClr val="666666"/>
+                  <a:srgbClr val="26231F"/>
                 </a:solidFill>
               </a:rPr>
               <a:t>장소를 입력하세요</a:t>
@@ -3480,14 +3574,14 @@
         </p:nvSpPr>
         <p:spPr>
           <a:xfrm>
-            <a:off x="9905695" y="-1463040"/>
-            <a:ext cx="3840480" cy="3840480"/>
-          </a:xfrm>
-          <a:prstGeom prst="ellipse">
+            <a:off x="0" y="6565392"/>
+            <a:ext cx="12191695" cy="292608"/>
+          </a:xfrm>
+          <a:prstGeom prst="rect">
             <a:avLst/>
           </a:prstGeom>
           <a:solidFill>
-            <a:srgbClr val="D2EFDC"/>
+            <a:srgbClr val="ADEBC2"/>
           </a:solidFill>
           <a:ln>
             <a:noFill/>
@@ -3509,14 +3603,81 @@
         </p:nvSpPr>
         <p:spPr>
           <a:xfrm>
-            <a:off x="11094415" y="274320"/>
-            <a:ext cx="411480" cy="411480"/>
-          </a:xfrm>
-          <a:prstGeom prst="ellipse">
+            <a:off x="640080" y="6400800"/>
+            <a:ext cx="10911535" cy="10972"/>
+          </a:xfrm>
+          <a:prstGeom prst="rect">
             <a:avLst/>
           </a:prstGeom>
           <a:solidFill>
-            <a:srgbClr val="29653D"/>
+            <a:srgbClr val="26231F"/>
+          </a:solidFill>
+          <a:ln>
+            <a:noFill/>
+          </a:ln>
+        </p:spPr>
+        <p:txBody>
+          <a:bodyPr rtlCol="0" anchor="ctr"/>
+          <a:lstStyle/>
+          <a:p>
+            <a:pPr algn="ctr"/>
+          </a:p>
+        </p:txBody>
+      </p:sp>
+      <p:sp>
+        <p:nvSpPr>
+          <p:cNvPr id="5" name="하단 라벨"/>
+          <p:cNvSpPr txBox="1"/>
+          <p:nvPr/>
+        </p:nvSpPr>
+        <p:spPr>
+          <a:xfrm>
+            <a:off x="640080" y="6437376"/>
+            <a:ext cx="5486400" cy="274320"/>
+          </a:xfrm>
+          <a:prstGeom prst="rect">
+            <a:avLst/>
+          </a:prstGeom>
+          <a:noFill/>
+        </p:spPr>
+        <p:txBody>
+          <a:bodyPr wrap="square" lIns="54864" rIns="54864" tIns="27432" bIns="27432" anchor="ctr">
+            <a:noAutofit/>
+          </a:bodyPr>
+          <a:lstStyle/>
+          <a:p>
+            <a:pPr algn="l">
+              <a:lnSpc>
+                <a:spcPct val="115000"/>
+              </a:lnSpc>
+            </a:pPr>
+            <a:r>
+              <a:rPr sz="900" b="1" i="0" spc="250">
+                <a:solidFill>
+                  <a:srgbClr val="26231F"/>
+                </a:solidFill>
+              </a:rPr>
+              <a:t>FIRST BIRTHDAY</a:t>
+            </a:r>
+          </a:p>
+        </p:txBody>
+      </p:sp>
+      <p:sp>
+        <p:nvSpPr>
+          <p:cNvPr id="6" name="포인트"/>
+          <p:cNvSpPr/>
+          <p:nvPr/>
+        </p:nvSpPr>
+        <p:spPr>
+          <a:xfrm>
+            <a:off x="11213287" y="6473952"/>
+            <a:ext cx="219456" cy="87782"/>
+          </a:xfrm>
+          <a:prstGeom prst="wave">
+            <a:avLst/>
+          </a:prstGeom>
+          <a:solidFill>
+            <a:srgbClr val="98E1B1"/>
           </a:solidFill>
           <a:ln>
             <a:noFill/>
@@ -3542,8 +3703,8 @@
         </p:nvSpPr>
         <p:spPr>
           <a:xfrm>
-            <a:off x="640080" y="457200"/>
-            <a:ext cx="9722815" cy="868680"/>
+            <a:off x="640080" y="502920"/>
+            <a:ext cx="10911535" cy="914400"/>
           </a:xfrm>
         </p:spPr>
         <p:txBody>
@@ -3560,7 +3721,7 @@
             <a:r>
               <a:rPr sz="3000" b="1" i="0">
                 <a:solidFill>
-                  <a:srgbClr val="183A23"/>
+                  <a:srgbClr val="26231F"/>
                 </a:solidFill>
               </a:rPr>
               <a:t>우리 아기를 소개합니다</a:t>
@@ -3570,14 +3731,14 @@
       </p:sp>
       <p:sp>
         <p:nvSpPr>
-          <p:cNvPr id="5" name="사진 자리"/>
+          <p:cNvPr id="7" name="사진 자리"/>
           <p:cNvSpPr/>
           <p:nvPr/>
         </p:nvSpPr>
         <p:spPr>
           <a:xfrm>
             <a:off x="640080" y="1600200"/>
-            <a:ext cx="3840480" cy="4617720"/>
+            <a:ext cx="3840480" cy="4389120"/>
           </a:xfrm>
           <a:prstGeom prst="roundRect">
             <a:avLst>
@@ -3585,12 +3746,10 @@
             </a:avLst>
           </a:prstGeom>
           <a:solidFill>
-            <a:srgbClr val="D2EFDC"/>
+            <a:srgbClr val="D5F6E0"/>
           </a:solidFill>
           <a:ln w="19050">
-            <a:solidFill>
-              <a:srgbClr val="29653D"/>
-            </a:solidFill>
+            <a:noFill/>
             <a:prstDash val="dash"/>
           </a:ln>
         </p:spPr>
@@ -3608,7 +3767,7 @@
             <a:r>
               <a:rPr sz="1400" b="0" i="0">
                 <a:solidFill>
-                  <a:srgbClr val="183A23"/>
+                  <a:srgbClr val="8E8780"/>
                 </a:solidFill>
               </a:rPr>
               <a:t>아기 사진을 넣어 주세요</a:t>
@@ -3618,7 +3777,7 @@
       </p:sp>
       <p:graphicFrame>
         <p:nvGraphicFramePr>
-          <p:cNvPr id="6" name="표"/>
+          <p:cNvPr id="8" name="표"/>
           <p:cNvGraphicFramePr>
             <a:graphicFrameLocks noGrp="1"/>
           </p:cNvGraphicFramePr>
@@ -3648,7 +3807,7 @@
                       <a:r>
                         <a:rPr sz="1500" b="1">
                           <a:solidFill>
-                            <a:srgbClr val="183A23"/>
+                            <a:srgbClr val="274932"/>
                           </a:solidFill>
                         </a:rPr>
                         <a:t>이름</a:t>
@@ -3658,30 +3817,30 @@
                   <a:tcPr anchor="ctr" marL="73152" marR="73152">
                     <a:lnL w="9525" cap="flat" cmpd="sng" algn="ctr">
                       <a:solidFill>
-                        <a:srgbClr val="D2EFDC"/>
+                        <a:srgbClr val="D5F6E0"/>
                       </a:solidFill>
                       <a:prstDash val="solid"/>
                     </a:lnL>
                     <a:lnR w="9525" cap="flat" cmpd="sng" algn="ctr">
                       <a:solidFill>
-                        <a:srgbClr val="D2EFDC"/>
+                        <a:srgbClr val="D5F6E0"/>
                       </a:solidFill>
                       <a:prstDash val="solid"/>
                     </a:lnR>
                     <a:lnT w="9525" cap="flat" cmpd="sng" algn="ctr">
                       <a:solidFill>
-                        <a:srgbClr val="D2EFDC"/>
+                        <a:srgbClr val="D5F6E0"/>
                       </a:solidFill>
                       <a:prstDash val="solid"/>
                     </a:lnT>
                     <a:lnB w="9525" cap="flat" cmpd="sng" algn="ctr">
                       <a:solidFill>
-                        <a:srgbClr val="D2EFDC"/>
+                        <a:srgbClr val="D5F6E0"/>
                       </a:solidFill>
                       <a:prstDash val="solid"/>
                     </a:lnB>
                     <a:solidFill>
-                      <a:srgbClr val="D2EFDC"/>
+                      <a:srgbClr val="D5F6E0"/>
                     </a:solidFill>
                   </a:tcPr>
                 </a:tc>
@@ -3694,7 +3853,7 @@
                       <a:r>
                         <a:rPr sz="1500" b="0">
                           <a:solidFill>
-                            <a:srgbClr val="2B2B2B"/>
+                            <a:srgbClr val="26231F"/>
                           </a:solidFill>
                         </a:rPr>
                         <a:t>입력하세요</a:t>
@@ -3704,30 +3863,30 @@
                   <a:tcPr anchor="ctr" marL="73152" marR="73152">
                     <a:lnL w="9525" cap="flat" cmpd="sng" algn="ctr">
                       <a:solidFill>
-                        <a:srgbClr val="D2EFDC"/>
+                        <a:srgbClr val="D5F6E0"/>
                       </a:solidFill>
                       <a:prstDash val="solid"/>
                     </a:lnL>
                     <a:lnR w="9525" cap="flat" cmpd="sng" algn="ctr">
                       <a:solidFill>
-                        <a:srgbClr val="D2EFDC"/>
+                        <a:srgbClr val="D5F6E0"/>
                       </a:solidFill>
                       <a:prstDash val="solid"/>
                     </a:lnR>
                     <a:lnT w="9525" cap="flat" cmpd="sng" algn="ctr">
                       <a:solidFill>
-                        <a:srgbClr val="D2EFDC"/>
+                        <a:srgbClr val="D5F6E0"/>
                       </a:solidFill>
                       <a:prstDash val="solid"/>
                     </a:lnT>
                     <a:lnB w="9525" cap="flat" cmpd="sng" algn="ctr">
                       <a:solidFill>
-                        <a:srgbClr val="D2EFDC"/>
+                        <a:srgbClr val="D5F6E0"/>
                       </a:solidFill>
                       <a:prstDash val="solid"/>
                     </a:lnB>
                     <a:solidFill>
-                      <a:srgbClr val="F1F9F3"/>
+                      <a:srgbClr val="ECFBF1"/>
                     </a:solidFill>
                   </a:tcPr>
                 </a:tc>
@@ -3742,7 +3901,7 @@
                       <a:r>
                         <a:rPr sz="1500" b="1">
                           <a:solidFill>
-                            <a:srgbClr val="183A23"/>
+                            <a:srgbClr val="274932"/>
                           </a:solidFill>
                         </a:rPr>
                         <a:t>생일</a:t>
@@ -3752,30 +3911,30 @@
                   <a:tcPr anchor="ctr" marL="73152" marR="73152">
                     <a:lnL w="9525" cap="flat" cmpd="sng" algn="ctr">
                       <a:solidFill>
-                        <a:srgbClr val="D2EFDC"/>
+                        <a:srgbClr val="D5F6E0"/>
                       </a:solidFill>
                       <a:prstDash val="solid"/>
                     </a:lnL>
                     <a:lnR w="9525" cap="flat" cmpd="sng" algn="ctr">
                       <a:solidFill>
-                        <a:srgbClr val="D2EFDC"/>
+                        <a:srgbClr val="D5F6E0"/>
                       </a:solidFill>
                       <a:prstDash val="solid"/>
                     </a:lnR>
                     <a:lnT w="9525" cap="flat" cmpd="sng" algn="ctr">
                       <a:solidFill>
-                        <a:srgbClr val="D2EFDC"/>
+                        <a:srgbClr val="D5F6E0"/>
                       </a:solidFill>
                       <a:prstDash val="solid"/>
                     </a:lnT>
                     <a:lnB w="9525" cap="flat" cmpd="sng" algn="ctr">
                       <a:solidFill>
-                        <a:srgbClr val="D2EFDC"/>
+                        <a:srgbClr val="D5F6E0"/>
                       </a:solidFill>
                       <a:prstDash val="solid"/>
                     </a:lnB>
                     <a:solidFill>
-                      <a:srgbClr val="D2EFDC"/>
+                      <a:srgbClr val="D5F6E0"/>
                     </a:solidFill>
                   </a:tcPr>
                 </a:tc>
@@ -3788,7 +3947,7 @@
                       <a:r>
                         <a:rPr sz="1500" b="0">
                           <a:solidFill>
-                            <a:srgbClr val="2B2B2B"/>
+                            <a:srgbClr val="26231F"/>
                           </a:solidFill>
                         </a:rPr>
                         <a:t>입력하세요</a:t>
@@ -3798,25 +3957,25 @@
                   <a:tcPr anchor="ctr" marL="73152" marR="73152">
                     <a:lnL w="9525" cap="flat" cmpd="sng" algn="ctr">
                       <a:solidFill>
-                        <a:srgbClr val="D2EFDC"/>
+                        <a:srgbClr val="D5F6E0"/>
                       </a:solidFill>
                       <a:prstDash val="solid"/>
                     </a:lnL>
                     <a:lnR w="9525" cap="flat" cmpd="sng" algn="ctr">
                       <a:solidFill>
-                        <a:srgbClr val="D2EFDC"/>
+                        <a:srgbClr val="D5F6E0"/>
                       </a:solidFill>
                       <a:prstDash val="solid"/>
                     </a:lnR>
                     <a:lnT w="9525" cap="flat" cmpd="sng" algn="ctr">
                       <a:solidFill>
-                        <a:srgbClr val="D2EFDC"/>
+                        <a:srgbClr val="D5F6E0"/>
                       </a:solidFill>
                       <a:prstDash val="solid"/>
                     </a:lnT>
                     <a:lnB w="9525" cap="flat" cmpd="sng" algn="ctr">
                       <a:solidFill>
-                        <a:srgbClr val="D2EFDC"/>
+                        <a:srgbClr val="D5F6E0"/>
                       </a:solidFill>
                       <a:prstDash val="solid"/>
                     </a:lnB>
@@ -3836,7 +3995,7 @@
                       <a:r>
                         <a:rPr sz="1500" b="1">
                           <a:solidFill>
-                            <a:srgbClr val="183A23"/>
+                            <a:srgbClr val="274932"/>
                           </a:solidFill>
                         </a:rPr>
                         <a:t>키 · 몸무게</a:t>
@@ -3846,30 +4005,30 @@
                   <a:tcPr anchor="ctr" marL="73152" marR="73152">
                     <a:lnL w="9525" cap="flat" cmpd="sng" algn="ctr">
                       <a:solidFill>
-                        <a:srgbClr val="D2EFDC"/>
+                        <a:srgbClr val="D5F6E0"/>
                       </a:solidFill>
                       <a:prstDash val="solid"/>
                     </a:lnL>
                     <a:lnR w="9525" cap="flat" cmpd="sng" algn="ctr">
                       <a:solidFill>
-                        <a:srgbClr val="D2EFDC"/>
+                        <a:srgbClr val="D5F6E0"/>
                       </a:solidFill>
                       <a:prstDash val="solid"/>
                     </a:lnR>
                     <a:lnT w="9525" cap="flat" cmpd="sng" algn="ctr">
                       <a:solidFill>
-                        <a:srgbClr val="D2EFDC"/>
+                        <a:srgbClr val="D5F6E0"/>
                       </a:solidFill>
                       <a:prstDash val="solid"/>
                     </a:lnT>
                     <a:lnB w="9525" cap="flat" cmpd="sng" algn="ctr">
                       <a:solidFill>
-                        <a:srgbClr val="D2EFDC"/>
+                        <a:srgbClr val="D5F6E0"/>
                       </a:solidFill>
                       <a:prstDash val="solid"/>
                     </a:lnB>
                     <a:solidFill>
-                      <a:srgbClr val="D2EFDC"/>
+                      <a:srgbClr val="D5F6E0"/>
                     </a:solidFill>
                   </a:tcPr>
                 </a:tc>
@@ -3882,7 +4041,7 @@
                       <a:r>
                         <a:rPr sz="1500" b="0">
                           <a:solidFill>
-                            <a:srgbClr val="2B2B2B"/>
+                            <a:srgbClr val="26231F"/>
                           </a:solidFill>
                         </a:rPr>
                         <a:t>입력하세요</a:t>
@@ -3892,30 +4051,30 @@
                   <a:tcPr anchor="ctr" marL="73152" marR="73152">
                     <a:lnL w="9525" cap="flat" cmpd="sng" algn="ctr">
                       <a:solidFill>
-                        <a:srgbClr val="D2EFDC"/>
+                        <a:srgbClr val="D5F6E0"/>
                       </a:solidFill>
                       <a:prstDash val="solid"/>
                     </a:lnL>
                     <a:lnR w="9525" cap="flat" cmpd="sng" algn="ctr">
                       <a:solidFill>
-                        <a:srgbClr val="D2EFDC"/>
+                        <a:srgbClr val="D5F6E0"/>
                       </a:solidFill>
                       <a:prstDash val="solid"/>
                     </a:lnR>
                     <a:lnT w="9525" cap="flat" cmpd="sng" algn="ctr">
                       <a:solidFill>
-                        <a:srgbClr val="D2EFDC"/>
+                        <a:srgbClr val="D5F6E0"/>
                       </a:solidFill>
                       <a:prstDash val="solid"/>
                     </a:lnT>
                     <a:lnB w="9525" cap="flat" cmpd="sng" algn="ctr">
                       <a:solidFill>
-                        <a:srgbClr val="D2EFDC"/>
+                        <a:srgbClr val="D5F6E0"/>
                       </a:solidFill>
                       <a:prstDash val="solid"/>
                     </a:lnB>
                     <a:solidFill>
-                      <a:srgbClr val="F1F9F3"/>
+                      <a:srgbClr val="ECFBF1"/>
                     </a:solidFill>
                   </a:tcPr>
                 </a:tc>
@@ -3930,7 +4089,7 @@
                       <a:r>
                         <a:rPr sz="1500" b="1">
                           <a:solidFill>
-                            <a:srgbClr val="183A23"/>
+                            <a:srgbClr val="274932"/>
                           </a:solidFill>
                         </a:rPr>
                         <a:t>좋아하는 것</a:t>
@@ -3940,30 +4099,30 @@
                   <a:tcPr anchor="ctr" marL="73152" marR="73152">
                     <a:lnL w="9525" cap="flat" cmpd="sng" algn="ctr">
                       <a:solidFill>
-                        <a:srgbClr val="D2EFDC"/>
+                        <a:srgbClr val="D5F6E0"/>
                       </a:solidFill>
                       <a:prstDash val="solid"/>
                     </a:lnL>
                     <a:lnR w="9525" cap="flat" cmpd="sng" algn="ctr">
                       <a:solidFill>
-                        <a:srgbClr val="D2EFDC"/>
+                        <a:srgbClr val="D5F6E0"/>
                       </a:solidFill>
                       <a:prstDash val="solid"/>
                     </a:lnR>
                     <a:lnT w="9525" cap="flat" cmpd="sng" algn="ctr">
                       <a:solidFill>
-                        <a:srgbClr val="D2EFDC"/>
+                        <a:srgbClr val="D5F6E0"/>
                       </a:solidFill>
                       <a:prstDash val="solid"/>
                     </a:lnT>
                     <a:lnB w="9525" cap="flat" cmpd="sng" algn="ctr">
                       <a:solidFill>
-                        <a:srgbClr val="D2EFDC"/>
+                        <a:srgbClr val="D5F6E0"/>
                       </a:solidFill>
                       <a:prstDash val="solid"/>
                     </a:lnB>
                     <a:solidFill>
-                      <a:srgbClr val="D2EFDC"/>
+                      <a:srgbClr val="D5F6E0"/>
                     </a:solidFill>
                   </a:tcPr>
                 </a:tc>
@@ -3976,7 +4135,7 @@
                       <a:r>
                         <a:rPr sz="1500" b="0">
                           <a:solidFill>
-                            <a:srgbClr val="2B2B2B"/>
+                            <a:srgbClr val="26231F"/>
                           </a:solidFill>
                         </a:rPr>
                         <a:t>입력하세요</a:t>
@@ -3986,25 +4145,25 @@
                   <a:tcPr anchor="ctr" marL="73152" marR="73152">
                     <a:lnL w="9525" cap="flat" cmpd="sng" algn="ctr">
                       <a:solidFill>
-                        <a:srgbClr val="D2EFDC"/>
+                        <a:srgbClr val="D5F6E0"/>
                       </a:solidFill>
                       <a:prstDash val="solid"/>
                     </a:lnL>
                     <a:lnR w="9525" cap="flat" cmpd="sng" algn="ctr">
                       <a:solidFill>
-                        <a:srgbClr val="D2EFDC"/>
+                        <a:srgbClr val="D5F6E0"/>
                       </a:solidFill>
                       <a:prstDash val="solid"/>
                     </a:lnR>
                     <a:lnT w="9525" cap="flat" cmpd="sng" algn="ctr">
                       <a:solidFill>
-                        <a:srgbClr val="D2EFDC"/>
+                        <a:srgbClr val="D5F6E0"/>
                       </a:solidFill>
                       <a:prstDash val="solid"/>
                     </a:lnT>
                     <a:lnB w="9525" cap="flat" cmpd="sng" algn="ctr">
                       <a:solidFill>
-                        <a:srgbClr val="D2EFDC"/>
+                        <a:srgbClr val="D5F6E0"/>
                       </a:solidFill>
                       <a:prstDash val="solid"/>
                     </a:lnB>
@@ -4024,7 +4183,7 @@
                       <a:r>
                         <a:rPr sz="1500" b="1">
                           <a:solidFill>
-                            <a:srgbClr val="183A23"/>
+                            <a:srgbClr val="274932"/>
                           </a:solidFill>
                         </a:rPr>
                         <a:t>별명</a:t>
@@ -4034,30 +4193,30 @@
                   <a:tcPr anchor="ctr" marL="73152" marR="73152">
                     <a:lnL w="9525" cap="flat" cmpd="sng" algn="ctr">
                       <a:solidFill>
-                        <a:srgbClr val="D2EFDC"/>
+                        <a:srgbClr val="D5F6E0"/>
                       </a:solidFill>
                       <a:prstDash val="solid"/>
                     </a:lnL>
                     <a:lnR w="9525" cap="flat" cmpd="sng" algn="ctr">
                       <a:solidFill>
-                        <a:srgbClr val="D2EFDC"/>
+                        <a:srgbClr val="D5F6E0"/>
                       </a:solidFill>
                       <a:prstDash val="solid"/>
                     </a:lnR>
                     <a:lnT w="9525" cap="flat" cmpd="sng" algn="ctr">
                       <a:solidFill>
-                        <a:srgbClr val="D2EFDC"/>
+                        <a:srgbClr val="D5F6E0"/>
                       </a:solidFill>
                       <a:prstDash val="solid"/>
                     </a:lnT>
                     <a:lnB w="9525" cap="flat" cmpd="sng" algn="ctr">
                       <a:solidFill>
-                        <a:srgbClr val="D2EFDC"/>
+                        <a:srgbClr val="D5F6E0"/>
                       </a:solidFill>
                       <a:prstDash val="solid"/>
                     </a:lnB>
                     <a:solidFill>
-                      <a:srgbClr val="D2EFDC"/>
+                      <a:srgbClr val="D5F6E0"/>
                     </a:solidFill>
                   </a:tcPr>
                 </a:tc>
@@ -4070,7 +4229,7 @@
                       <a:r>
                         <a:rPr sz="1500" b="0">
                           <a:solidFill>
-                            <a:srgbClr val="2B2B2B"/>
+                            <a:srgbClr val="26231F"/>
                           </a:solidFill>
                         </a:rPr>
                         <a:t>입력하세요</a:t>
@@ -4080,30 +4239,30 @@
                   <a:tcPr anchor="ctr" marL="73152" marR="73152">
                     <a:lnL w="9525" cap="flat" cmpd="sng" algn="ctr">
                       <a:solidFill>
-                        <a:srgbClr val="D2EFDC"/>
+                        <a:srgbClr val="D5F6E0"/>
                       </a:solidFill>
                       <a:prstDash val="solid"/>
                     </a:lnL>
                     <a:lnR w="9525" cap="flat" cmpd="sng" algn="ctr">
                       <a:solidFill>
-                        <a:srgbClr val="D2EFDC"/>
+                        <a:srgbClr val="D5F6E0"/>
                       </a:solidFill>
                       <a:prstDash val="solid"/>
                     </a:lnR>
                     <a:lnT w="9525" cap="flat" cmpd="sng" algn="ctr">
                       <a:solidFill>
-                        <a:srgbClr val="D2EFDC"/>
+                        <a:srgbClr val="D5F6E0"/>
                       </a:solidFill>
                       <a:prstDash val="solid"/>
                     </a:lnT>
                     <a:lnB w="9525" cap="flat" cmpd="sng" algn="ctr">
                       <a:solidFill>
-                        <a:srgbClr val="D2EFDC"/>
+                        <a:srgbClr val="D5F6E0"/>
                       </a:solidFill>
                       <a:prstDash val="solid"/>
                     </a:lnB>
                     <a:solidFill>
-                      <a:srgbClr val="F1F9F3"/>
+                      <a:srgbClr val="ECFBF1"/>
                     </a:solidFill>
                   </a:tcPr>
                 </a:tc>
@@ -4118,7 +4277,7 @@
                       <a:r>
                         <a:rPr sz="1500" b="1">
                           <a:solidFill>
-                            <a:srgbClr val="183A23"/>
+                            <a:srgbClr val="274932"/>
                           </a:solidFill>
                         </a:rPr>
                         <a:t>부모의 마음</a:t>
@@ -4128,30 +4287,30 @@
                   <a:tcPr anchor="ctr" marL="73152" marR="73152">
                     <a:lnL w="9525" cap="flat" cmpd="sng" algn="ctr">
                       <a:solidFill>
-                        <a:srgbClr val="D2EFDC"/>
+                        <a:srgbClr val="D5F6E0"/>
                       </a:solidFill>
                       <a:prstDash val="solid"/>
                     </a:lnL>
                     <a:lnR w="9525" cap="flat" cmpd="sng" algn="ctr">
                       <a:solidFill>
-                        <a:srgbClr val="D2EFDC"/>
+                        <a:srgbClr val="D5F6E0"/>
                       </a:solidFill>
                       <a:prstDash val="solid"/>
                     </a:lnR>
                     <a:lnT w="9525" cap="flat" cmpd="sng" algn="ctr">
                       <a:solidFill>
-                        <a:srgbClr val="D2EFDC"/>
+                        <a:srgbClr val="D5F6E0"/>
                       </a:solidFill>
                       <a:prstDash val="solid"/>
                     </a:lnT>
                     <a:lnB w="9525" cap="flat" cmpd="sng" algn="ctr">
                       <a:solidFill>
-                        <a:srgbClr val="D2EFDC"/>
+                        <a:srgbClr val="D5F6E0"/>
                       </a:solidFill>
                       <a:prstDash val="solid"/>
                     </a:lnB>
                     <a:solidFill>
-                      <a:srgbClr val="D2EFDC"/>
+                      <a:srgbClr val="D5F6E0"/>
                     </a:solidFill>
                   </a:tcPr>
                 </a:tc>
@@ -4164,7 +4323,7 @@
                       <a:r>
                         <a:rPr sz="1500" b="0">
                           <a:solidFill>
-                            <a:srgbClr val="2B2B2B"/>
+                            <a:srgbClr val="26231F"/>
                           </a:solidFill>
                         </a:rPr>
                         <a:t>입력하세요</a:t>
@@ -4174,25 +4333,25 @@
                   <a:tcPr anchor="ctr" marL="73152" marR="73152">
                     <a:lnL w="9525" cap="flat" cmpd="sng" algn="ctr">
                       <a:solidFill>
-                        <a:srgbClr val="D2EFDC"/>
+                        <a:srgbClr val="D5F6E0"/>
                       </a:solidFill>
                       <a:prstDash val="solid"/>
                     </a:lnL>
                     <a:lnR w="9525" cap="flat" cmpd="sng" algn="ctr">
                       <a:solidFill>
-                        <a:srgbClr val="D2EFDC"/>
+                        <a:srgbClr val="D5F6E0"/>
                       </a:solidFill>
                       <a:prstDash val="solid"/>
                     </a:lnR>
                     <a:lnT w="9525" cap="flat" cmpd="sng" algn="ctr">
                       <a:solidFill>
-                        <a:srgbClr val="D2EFDC"/>
+                        <a:srgbClr val="D5F6E0"/>
                       </a:solidFill>
                       <a:prstDash val="solid"/>
                     </a:lnT>
                     <a:lnB w="9525" cap="flat" cmpd="sng" algn="ctr">
                       <a:solidFill>
-                        <a:srgbClr val="D2EFDC"/>
+                        <a:srgbClr val="D5F6E0"/>
                       </a:solidFill>
                       <a:prstDash val="solid"/>
                     </a:lnB>
@@ -4240,14 +4399,14 @@
         </p:nvSpPr>
         <p:spPr>
           <a:xfrm>
-            <a:off x="9905695" y="-1463040"/>
-            <a:ext cx="3840480" cy="3840480"/>
-          </a:xfrm>
-          <a:prstGeom prst="ellipse">
+            <a:off x="0" y="6565392"/>
+            <a:ext cx="12191695" cy="292608"/>
+          </a:xfrm>
+          <a:prstGeom prst="rect">
             <a:avLst/>
           </a:prstGeom>
           <a:solidFill>
-            <a:srgbClr val="D2EFDC"/>
+            <a:srgbClr val="ADEBC2"/>
           </a:solidFill>
           <a:ln>
             <a:noFill/>
@@ -4269,14 +4428,81 @@
         </p:nvSpPr>
         <p:spPr>
           <a:xfrm>
-            <a:off x="11094415" y="274320"/>
-            <a:ext cx="411480" cy="411480"/>
-          </a:xfrm>
-          <a:prstGeom prst="ellipse">
+            <a:off x="640080" y="6400800"/>
+            <a:ext cx="10911535" cy="10972"/>
+          </a:xfrm>
+          <a:prstGeom prst="rect">
             <a:avLst/>
           </a:prstGeom>
           <a:solidFill>
-            <a:srgbClr val="29653D"/>
+            <a:srgbClr val="26231F"/>
+          </a:solidFill>
+          <a:ln>
+            <a:noFill/>
+          </a:ln>
+        </p:spPr>
+        <p:txBody>
+          <a:bodyPr rtlCol="0" anchor="ctr"/>
+          <a:lstStyle/>
+          <a:p>
+            <a:pPr algn="ctr"/>
+          </a:p>
+        </p:txBody>
+      </p:sp>
+      <p:sp>
+        <p:nvSpPr>
+          <p:cNvPr id="5" name="하단 라벨"/>
+          <p:cNvSpPr txBox="1"/>
+          <p:nvPr/>
+        </p:nvSpPr>
+        <p:spPr>
+          <a:xfrm>
+            <a:off x="640080" y="6437376"/>
+            <a:ext cx="5486400" cy="274320"/>
+          </a:xfrm>
+          <a:prstGeom prst="rect">
+            <a:avLst/>
+          </a:prstGeom>
+          <a:noFill/>
+        </p:spPr>
+        <p:txBody>
+          <a:bodyPr wrap="square" lIns="54864" rIns="54864" tIns="27432" bIns="27432" anchor="ctr">
+            <a:noAutofit/>
+          </a:bodyPr>
+          <a:lstStyle/>
+          <a:p>
+            <a:pPr algn="l">
+              <a:lnSpc>
+                <a:spcPct val="115000"/>
+              </a:lnSpc>
+            </a:pPr>
+            <a:r>
+              <a:rPr sz="900" b="1" i="0" spc="250">
+                <a:solidFill>
+                  <a:srgbClr val="26231F"/>
+                </a:solidFill>
+              </a:rPr>
+              <a:t>FIRST BIRTHDAY</a:t>
+            </a:r>
+          </a:p>
+        </p:txBody>
+      </p:sp>
+      <p:sp>
+        <p:nvSpPr>
+          <p:cNvPr id="6" name="포인트"/>
+          <p:cNvSpPr/>
+          <p:nvPr/>
+        </p:nvSpPr>
+        <p:spPr>
+          <a:xfrm>
+            <a:off x="11213287" y="6473952"/>
+            <a:ext cx="219456" cy="87782"/>
+          </a:xfrm>
+          <a:prstGeom prst="wave">
+            <a:avLst/>
+          </a:prstGeom>
+          <a:solidFill>
+            <a:srgbClr val="98E1B1"/>
           </a:solidFill>
           <a:ln>
             <a:noFill/>
@@ -4302,8 +4528,8 @@
         </p:nvSpPr>
         <p:spPr>
           <a:xfrm>
-            <a:off x="640080" y="457200"/>
-            <a:ext cx="9722815" cy="868680"/>
+            <a:off x="640080" y="502920"/>
+            <a:ext cx="10911535" cy="914400"/>
           </a:xfrm>
         </p:spPr>
         <p:txBody>
@@ -4320,7 +4546,7 @@
             <a:r>
               <a:rPr sz="3000" b="1" i="0">
                 <a:solidFill>
-                  <a:srgbClr val="183A23"/>
+                  <a:srgbClr val="26231F"/>
                 </a:solidFill>
               </a:rPr>
               <a:t>돌잡이 이야기</a:t>
@@ -4330,26 +4556,26 @@
       </p:sp>
       <p:sp>
         <p:nvSpPr>
-          <p:cNvPr id="5" name="카드 1"/>
+          <p:cNvPr id="7" name="카드 1"/>
           <p:cNvSpPr/>
           <p:nvPr/>
         </p:nvSpPr>
         <p:spPr>
           <a:xfrm>
             <a:off x="640080" y="1600200"/>
-            <a:ext cx="2556433" cy="4800600"/>
+            <a:ext cx="2556433" cy="4572000"/>
           </a:xfrm>
           <a:prstGeom prst="roundRect">
             <a:avLst>
-              <a:gd name="adj" fmla="val 8000"/>
+              <a:gd name="adj" fmla="val 3000"/>
             </a:avLst>
           </a:prstGeom>
           <a:solidFill>
-            <a:srgbClr val="F1F9F3"/>
+            <a:srgbClr val="FFFFFF"/>
           </a:solidFill>
-          <a:ln w="15875">
+          <a:ln w="9525">
             <a:solidFill>
-              <a:srgbClr val="D2EFDC"/>
+              <a:srgbClr val="D5F6E0"/>
             </a:solidFill>
           </a:ln>
         </p:spPr>
@@ -4363,20 +4589,51 @@
       </p:sp>
       <p:sp>
         <p:nvSpPr>
-          <p:cNvPr id="6" name="번호 1"/>
+          <p:cNvPr id="8" name="위쪽 띠"/>
           <p:cNvSpPr/>
           <p:nvPr/>
         </p:nvSpPr>
         <p:spPr>
           <a:xfrm>
-            <a:off x="822959" y="1783080"/>
-            <a:ext cx="457200" cy="457200"/>
-          </a:xfrm>
-          <a:prstGeom prst="ellipse">
+            <a:off x="649224" y="1609344"/>
+            <a:ext cx="2538145" cy="82296"/>
+          </a:xfrm>
+          <a:prstGeom prst="rect">
             <a:avLst/>
           </a:prstGeom>
           <a:solidFill>
-            <a:srgbClr val="29653D"/>
+            <a:srgbClr val="98E1B1"/>
+          </a:solidFill>
+          <a:ln>
+            <a:noFill/>
+          </a:ln>
+        </p:spPr>
+        <p:txBody>
+          <a:bodyPr rtlCol="0" anchor="ctr"/>
+          <a:lstStyle/>
+          <a:p>
+            <a:pPr algn="ctr"/>
+          </a:p>
+        </p:txBody>
+      </p:sp>
+      <p:sp>
+        <p:nvSpPr>
+          <p:cNvPr id="9" name="번호 1"/>
+          <p:cNvSpPr/>
+          <p:nvPr/>
+        </p:nvSpPr>
+        <p:spPr>
+          <a:xfrm>
+            <a:off x="822959" y="1783080"/>
+            <a:ext cx="457200" cy="457200"/>
+          </a:xfrm>
+          <a:prstGeom prst="roundRect">
+            <a:avLst>
+              <a:gd name="adj" fmla="val 25000"/>
+            </a:avLst>
+          </a:prstGeom>
+          <a:solidFill>
+            <a:srgbClr val="98E1B1"/>
           </a:solidFill>
           <a:ln>
             <a:noFill/>
@@ -4396,7 +4653,7 @@
             <a:r>
               <a:rPr sz="1600" b="1" i="0">
                 <a:solidFill>
-                  <a:srgbClr val="FFFFFF"/>
+                  <a:srgbClr val="26231F"/>
                 </a:solidFill>
               </a:rPr>
               <a:t>1</a:t>
@@ -4406,7 +4663,7 @@
       </p:sp>
       <p:sp>
         <p:nvSpPr>
-          <p:cNvPr id="7" name="TextBox 6"/>
+          <p:cNvPr id="10" name="TextBox 9"/>
           <p:cNvSpPr txBox="1"/>
           <p:nvPr/>
         </p:nvSpPr>
@@ -4434,7 +4691,7 @@
             <a:r>
               <a:rPr sz="1600" b="1" i="0">
                 <a:solidFill>
-                  <a:srgbClr val="183A23"/>
+                  <a:srgbClr val="274932"/>
                 </a:solidFill>
               </a:rPr>
               <a:t>연필 · 공부</a:t>
@@ -4444,14 +4701,14 @@
       </p:sp>
       <p:sp>
         <p:nvSpPr>
-          <p:cNvPr id="8" name="TextBox 7"/>
+          <p:cNvPr id="11" name="TextBox 10"/>
           <p:cNvSpPr txBox="1"/>
           <p:nvPr/>
         </p:nvSpPr>
         <p:spPr>
           <a:xfrm>
             <a:off x="777240" y="3063240"/>
-            <a:ext cx="2282113" cy="3200400"/>
+            <a:ext cx="2282113" cy="2971800"/>
           </a:xfrm>
           <a:prstGeom prst="rect">
             <a:avLst/>
@@ -4472,7 +4729,7 @@
             <a:r>
               <a:rPr sz="1400" b="0" i="0">
                 <a:solidFill>
-                  <a:srgbClr val="2B2B2B"/>
+                  <a:srgbClr val="26231F"/>
                 </a:solidFill>
               </a:rPr>
               <a:t>학문과 총명을 바라는 마음</a:t>
@@ -4482,26 +4739,26 @@
       </p:sp>
       <p:sp>
         <p:nvSpPr>
-          <p:cNvPr id="9" name="카드 2"/>
+          <p:cNvPr id="12" name="카드 2"/>
           <p:cNvSpPr/>
           <p:nvPr/>
         </p:nvSpPr>
         <p:spPr>
           <a:xfrm>
             <a:off x="3425113" y="1600200"/>
-            <a:ext cx="2556433" cy="4800600"/>
+            <a:ext cx="2556433" cy="4572000"/>
           </a:xfrm>
           <a:prstGeom prst="roundRect">
             <a:avLst>
-              <a:gd name="adj" fmla="val 8000"/>
+              <a:gd name="adj" fmla="val 3000"/>
             </a:avLst>
           </a:prstGeom>
           <a:solidFill>
-            <a:srgbClr val="F1F9F3"/>
+            <a:srgbClr val="FFFFFF"/>
           </a:solidFill>
-          <a:ln w="15875">
+          <a:ln w="9525">
             <a:solidFill>
-              <a:srgbClr val="D2EFDC"/>
+              <a:srgbClr val="D5F6E0"/>
             </a:solidFill>
           </a:ln>
         </p:spPr>
@@ -4515,20 +4772,51 @@
       </p:sp>
       <p:sp>
         <p:nvSpPr>
-          <p:cNvPr id="10" name="번호 2"/>
+          <p:cNvPr id="13" name="위쪽 띠"/>
           <p:cNvSpPr/>
           <p:nvPr/>
         </p:nvSpPr>
         <p:spPr>
           <a:xfrm>
-            <a:off x="3607993" y="1783080"/>
-            <a:ext cx="457200" cy="457200"/>
-          </a:xfrm>
-          <a:prstGeom prst="ellipse">
+            <a:off x="3434257" y="1609344"/>
+            <a:ext cx="2538145" cy="82296"/>
+          </a:xfrm>
+          <a:prstGeom prst="rect">
             <a:avLst/>
           </a:prstGeom>
           <a:solidFill>
-            <a:srgbClr val="29653D"/>
+            <a:srgbClr val="98E1B1"/>
+          </a:solidFill>
+          <a:ln>
+            <a:noFill/>
+          </a:ln>
+        </p:spPr>
+        <p:txBody>
+          <a:bodyPr rtlCol="0" anchor="ctr"/>
+          <a:lstStyle/>
+          <a:p>
+            <a:pPr algn="ctr"/>
+          </a:p>
+        </p:txBody>
+      </p:sp>
+      <p:sp>
+        <p:nvSpPr>
+          <p:cNvPr id="14" name="번호 2"/>
+          <p:cNvSpPr/>
+          <p:nvPr/>
+        </p:nvSpPr>
+        <p:spPr>
+          <a:xfrm>
+            <a:off x="3607993" y="1783080"/>
+            <a:ext cx="457200" cy="457200"/>
+          </a:xfrm>
+          <a:prstGeom prst="roundRect">
+            <a:avLst>
+              <a:gd name="adj" fmla="val 25000"/>
+            </a:avLst>
+          </a:prstGeom>
+          <a:solidFill>
+            <a:srgbClr val="98E1B1"/>
           </a:solidFill>
           <a:ln>
             <a:noFill/>
@@ -4548,7 +4836,7 @@
             <a:r>
               <a:rPr sz="1600" b="1" i="0">
                 <a:solidFill>
-                  <a:srgbClr val="FFFFFF"/>
+                  <a:srgbClr val="26231F"/>
                 </a:solidFill>
               </a:rPr>
               <a:t>2</a:t>
@@ -4558,7 +4846,7 @@
       </p:sp>
       <p:sp>
         <p:nvSpPr>
-          <p:cNvPr id="11" name="TextBox 10"/>
+          <p:cNvPr id="15" name="TextBox 14"/>
           <p:cNvSpPr txBox="1"/>
           <p:nvPr/>
         </p:nvSpPr>
@@ -4586,7 +4874,7 @@
             <a:r>
               <a:rPr sz="1600" b="1" i="0">
                 <a:solidFill>
-                  <a:srgbClr val="183A23"/>
+                  <a:srgbClr val="274932"/>
                 </a:solidFill>
               </a:rPr>
               <a:t>실 · 장수</a:t>
@@ -4596,14 +4884,14 @@
       </p:sp>
       <p:sp>
         <p:nvSpPr>
-          <p:cNvPr id="12" name="TextBox 11"/>
+          <p:cNvPr id="16" name="TextBox 15"/>
           <p:cNvSpPr txBox="1"/>
           <p:nvPr/>
         </p:nvSpPr>
         <p:spPr>
           <a:xfrm>
             <a:off x="3562273" y="3063240"/>
-            <a:ext cx="2282113" cy="3200400"/>
+            <a:ext cx="2282113" cy="2971800"/>
           </a:xfrm>
           <a:prstGeom prst="rect">
             <a:avLst/>
@@ -4624,7 +4912,7 @@
             <a:r>
               <a:rPr sz="1400" b="0" i="0">
                 <a:solidFill>
-                  <a:srgbClr val="2B2B2B"/>
+                  <a:srgbClr val="26231F"/>
                 </a:solidFill>
               </a:rPr>
               <a:t>건강하고 오래 살기를</a:t>
@@ -4634,26 +4922,26 @@
       </p:sp>
       <p:sp>
         <p:nvSpPr>
-          <p:cNvPr id="13" name="카드 3"/>
+          <p:cNvPr id="17" name="카드 3"/>
           <p:cNvSpPr/>
           <p:nvPr/>
         </p:nvSpPr>
         <p:spPr>
           <a:xfrm>
             <a:off x="6210147" y="1600200"/>
-            <a:ext cx="2556433" cy="4800600"/>
+            <a:ext cx="2556433" cy="4572000"/>
           </a:xfrm>
           <a:prstGeom prst="roundRect">
             <a:avLst>
-              <a:gd name="adj" fmla="val 8000"/>
+              <a:gd name="adj" fmla="val 3000"/>
             </a:avLst>
           </a:prstGeom>
           <a:solidFill>
-            <a:srgbClr val="F1F9F3"/>
+            <a:srgbClr val="FFFFFF"/>
           </a:solidFill>
-          <a:ln w="15875">
+          <a:ln w="9525">
             <a:solidFill>
-              <a:srgbClr val="D2EFDC"/>
+              <a:srgbClr val="D5F6E0"/>
             </a:solidFill>
           </a:ln>
         </p:spPr>
@@ -4667,20 +4955,51 @@
       </p:sp>
       <p:sp>
         <p:nvSpPr>
-          <p:cNvPr id="14" name="번호 3"/>
+          <p:cNvPr id="18" name="위쪽 띠"/>
           <p:cNvSpPr/>
           <p:nvPr/>
         </p:nvSpPr>
         <p:spPr>
           <a:xfrm>
-            <a:off x="6393027" y="1783080"/>
-            <a:ext cx="457200" cy="457200"/>
-          </a:xfrm>
-          <a:prstGeom prst="ellipse">
+            <a:off x="6219291" y="1609344"/>
+            <a:ext cx="2538145" cy="82296"/>
+          </a:xfrm>
+          <a:prstGeom prst="rect">
             <a:avLst/>
           </a:prstGeom>
           <a:solidFill>
-            <a:srgbClr val="29653D"/>
+            <a:srgbClr val="98E1B1"/>
+          </a:solidFill>
+          <a:ln>
+            <a:noFill/>
+          </a:ln>
+        </p:spPr>
+        <p:txBody>
+          <a:bodyPr rtlCol="0" anchor="ctr"/>
+          <a:lstStyle/>
+          <a:p>
+            <a:pPr algn="ctr"/>
+          </a:p>
+        </p:txBody>
+      </p:sp>
+      <p:sp>
+        <p:nvSpPr>
+          <p:cNvPr id="19" name="번호 3"/>
+          <p:cNvSpPr/>
+          <p:nvPr/>
+        </p:nvSpPr>
+        <p:spPr>
+          <a:xfrm>
+            <a:off x="6393027" y="1783080"/>
+            <a:ext cx="457200" cy="457200"/>
+          </a:xfrm>
+          <a:prstGeom prst="roundRect">
+            <a:avLst>
+              <a:gd name="adj" fmla="val 25000"/>
+            </a:avLst>
+          </a:prstGeom>
+          <a:solidFill>
+            <a:srgbClr val="98E1B1"/>
           </a:solidFill>
           <a:ln>
             <a:noFill/>
@@ -4700,7 +5019,7 @@
             <a:r>
               <a:rPr sz="1600" b="1" i="0">
                 <a:solidFill>
-                  <a:srgbClr val="FFFFFF"/>
+                  <a:srgbClr val="26231F"/>
                 </a:solidFill>
               </a:rPr>
               <a:t>3</a:t>
@@ -4710,7 +5029,7 @@
       </p:sp>
       <p:sp>
         <p:nvSpPr>
-          <p:cNvPr id="15" name="TextBox 14"/>
+          <p:cNvPr id="20" name="TextBox 19"/>
           <p:cNvSpPr txBox="1"/>
           <p:nvPr/>
         </p:nvSpPr>
@@ -4738,7 +5057,7 @@
             <a:r>
               <a:rPr sz="1600" b="1" i="0">
                 <a:solidFill>
-                  <a:srgbClr val="183A23"/>
+                  <a:srgbClr val="274932"/>
                 </a:solidFill>
               </a:rPr>
               <a:t>돈 · 부</a:t>
@@ -4748,14 +5067,14 @@
       </p:sp>
       <p:sp>
         <p:nvSpPr>
-          <p:cNvPr id="16" name="TextBox 15"/>
+          <p:cNvPr id="21" name="TextBox 20"/>
           <p:cNvSpPr txBox="1"/>
           <p:nvPr/>
         </p:nvSpPr>
         <p:spPr>
           <a:xfrm>
             <a:off x="6347307" y="3063240"/>
-            <a:ext cx="2282113" cy="3200400"/>
+            <a:ext cx="2282113" cy="2971800"/>
           </a:xfrm>
           <a:prstGeom prst="rect">
             <a:avLst/>
@@ -4776,7 +5095,7 @@
             <a:r>
               <a:rPr sz="1400" b="0" i="0">
                 <a:solidFill>
-                  <a:srgbClr val="2B2B2B"/>
+                  <a:srgbClr val="26231F"/>
                 </a:solidFill>
               </a:rPr>
               <a:t>넉넉한 삶을 바라는 마음</a:t>
@@ -4786,26 +5105,26 @@
       </p:sp>
       <p:sp>
         <p:nvSpPr>
-          <p:cNvPr id="17" name="카드 4"/>
+          <p:cNvPr id="22" name="카드 4"/>
           <p:cNvSpPr/>
           <p:nvPr/>
         </p:nvSpPr>
         <p:spPr>
           <a:xfrm>
             <a:off x="8995181" y="1600200"/>
-            <a:ext cx="2556433" cy="4800600"/>
+            <a:ext cx="2556433" cy="4572000"/>
           </a:xfrm>
           <a:prstGeom prst="roundRect">
             <a:avLst>
-              <a:gd name="adj" fmla="val 8000"/>
+              <a:gd name="adj" fmla="val 3000"/>
             </a:avLst>
           </a:prstGeom>
           <a:solidFill>
-            <a:srgbClr val="F1F9F3"/>
+            <a:srgbClr val="FFFFFF"/>
           </a:solidFill>
-          <a:ln w="15875">
+          <a:ln w="9525">
             <a:solidFill>
-              <a:srgbClr val="D2EFDC"/>
+              <a:srgbClr val="D5F6E0"/>
             </a:solidFill>
           </a:ln>
         </p:spPr>
@@ -4819,20 +5138,51 @@
       </p:sp>
       <p:sp>
         <p:nvSpPr>
-          <p:cNvPr id="18" name="번호 4"/>
+          <p:cNvPr id="23" name="위쪽 띠"/>
           <p:cNvSpPr/>
           <p:nvPr/>
         </p:nvSpPr>
         <p:spPr>
           <a:xfrm>
-            <a:off x="9178061" y="1783080"/>
-            <a:ext cx="457200" cy="457200"/>
-          </a:xfrm>
-          <a:prstGeom prst="ellipse">
+            <a:off x="9004325" y="1609344"/>
+            <a:ext cx="2538145" cy="82296"/>
+          </a:xfrm>
+          <a:prstGeom prst="rect">
             <a:avLst/>
           </a:prstGeom>
           <a:solidFill>
-            <a:srgbClr val="29653D"/>
+            <a:srgbClr val="98E1B1"/>
+          </a:solidFill>
+          <a:ln>
+            <a:noFill/>
+          </a:ln>
+        </p:spPr>
+        <p:txBody>
+          <a:bodyPr rtlCol="0" anchor="ctr"/>
+          <a:lstStyle/>
+          <a:p>
+            <a:pPr algn="ctr"/>
+          </a:p>
+        </p:txBody>
+      </p:sp>
+      <p:sp>
+        <p:nvSpPr>
+          <p:cNvPr id="24" name="번호 4"/>
+          <p:cNvSpPr/>
+          <p:nvPr/>
+        </p:nvSpPr>
+        <p:spPr>
+          <a:xfrm>
+            <a:off x="9178061" y="1783080"/>
+            <a:ext cx="457200" cy="457200"/>
+          </a:xfrm>
+          <a:prstGeom prst="roundRect">
+            <a:avLst>
+              <a:gd name="adj" fmla="val 25000"/>
+            </a:avLst>
+          </a:prstGeom>
+          <a:solidFill>
+            <a:srgbClr val="98E1B1"/>
           </a:solidFill>
           <a:ln>
             <a:noFill/>
@@ -4852,7 +5202,7 @@
             <a:r>
               <a:rPr sz="1600" b="1" i="0">
                 <a:solidFill>
-                  <a:srgbClr val="FFFFFF"/>
+                  <a:srgbClr val="26231F"/>
                 </a:solidFill>
               </a:rPr>
               <a:t>4</a:t>
@@ -4862,7 +5212,7 @@
       </p:sp>
       <p:sp>
         <p:nvSpPr>
-          <p:cNvPr id="19" name="TextBox 18"/>
+          <p:cNvPr id="25" name="TextBox 24"/>
           <p:cNvSpPr txBox="1"/>
           <p:nvPr/>
         </p:nvSpPr>
@@ -4890,7 +5240,7 @@
             <a:r>
               <a:rPr sz="1600" b="1" i="0">
                 <a:solidFill>
-                  <a:srgbClr val="183A23"/>
+                  <a:srgbClr val="274932"/>
                 </a:solidFill>
               </a:rPr>
               <a:t>마이크 · 인기</a:t>
@@ -4900,14 +5250,14 @@
       </p:sp>
       <p:sp>
         <p:nvSpPr>
-          <p:cNvPr id="20" name="TextBox 19"/>
+          <p:cNvPr id="26" name="TextBox 25"/>
           <p:cNvSpPr txBox="1"/>
           <p:nvPr/>
         </p:nvSpPr>
         <p:spPr>
           <a:xfrm>
             <a:off x="9132341" y="3063240"/>
-            <a:ext cx="2282113" cy="3200400"/>
+            <a:ext cx="2282113" cy="2971800"/>
           </a:xfrm>
           <a:prstGeom prst="rect">
             <a:avLst/>
@@ -4928,7 +5278,7 @@
             <a:r>
               <a:rPr sz="1400" b="0" i="0">
                 <a:solidFill>
-                  <a:srgbClr val="2B2B2B"/>
+                  <a:srgbClr val="26231F"/>
                 </a:solidFill>
               </a:rPr>
               <a:t>사람들에게 사랑받기를</a:t>
@@ -4970,14 +5320,14 @@
         </p:nvSpPr>
         <p:spPr>
           <a:xfrm>
-            <a:off x="9905695" y="-1463040"/>
-            <a:ext cx="3840480" cy="3840480"/>
-          </a:xfrm>
-          <a:prstGeom prst="ellipse">
+            <a:off x="0" y="6565392"/>
+            <a:ext cx="12191695" cy="292608"/>
+          </a:xfrm>
+          <a:prstGeom prst="rect">
             <a:avLst/>
           </a:prstGeom>
           <a:solidFill>
-            <a:srgbClr val="D2EFDC"/>
+            <a:srgbClr val="ADEBC2"/>
           </a:solidFill>
           <a:ln>
             <a:noFill/>
@@ -4999,14 +5349,81 @@
         </p:nvSpPr>
         <p:spPr>
           <a:xfrm>
-            <a:off x="11094415" y="274320"/>
-            <a:ext cx="411480" cy="411480"/>
-          </a:xfrm>
-          <a:prstGeom prst="ellipse">
+            <a:off x="640080" y="6400800"/>
+            <a:ext cx="10911535" cy="10972"/>
+          </a:xfrm>
+          <a:prstGeom prst="rect">
             <a:avLst/>
           </a:prstGeom>
           <a:solidFill>
-            <a:srgbClr val="29653D"/>
+            <a:srgbClr val="26231F"/>
+          </a:solidFill>
+          <a:ln>
+            <a:noFill/>
+          </a:ln>
+        </p:spPr>
+        <p:txBody>
+          <a:bodyPr rtlCol="0" anchor="ctr"/>
+          <a:lstStyle/>
+          <a:p>
+            <a:pPr algn="ctr"/>
+          </a:p>
+        </p:txBody>
+      </p:sp>
+      <p:sp>
+        <p:nvSpPr>
+          <p:cNvPr id="5" name="하단 라벨"/>
+          <p:cNvSpPr txBox="1"/>
+          <p:nvPr/>
+        </p:nvSpPr>
+        <p:spPr>
+          <a:xfrm>
+            <a:off x="640080" y="6437376"/>
+            <a:ext cx="5486400" cy="274320"/>
+          </a:xfrm>
+          <a:prstGeom prst="rect">
+            <a:avLst/>
+          </a:prstGeom>
+          <a:noFill/>
+        </p:spPr>
+        <p:txBody>
+          <a:bodyPr wrap="square" lIns="54864" rIns="54864" tIns="27432" bIns="27432" anchor="ctr">
+            <a:noAutofit/>
+          </a:bodyPr>
+          <a:lstStyle/>
+          <a:p>
+            <a:pPr algn="l">
+              <a:lnSpc>
+                <a:spcPct val="115000"/>
+              </a:lnSpc>
+            </a:pPr>
+            <a:r>
+              <a:rPr sz="900" b="1" i="0" spc="250">
+                <a:solidFill>
+                  <a:srgbClr val="26231F"/>
+                </a:solidFill>
+              </a:rPr>
+              <a:t>FIRST BIRTHDAY</a:t>
+            </a:r>
+          </a:p>
+        </p:txBody>
+      </p:sp>
+      <p:sp>
+        <p:nvSpPr>
+          <p:cNvPr id="6" name="포인트"/>
+          <p:cNvSpPr/>
+          <p:nvPr/>
+        </p:nvSpPr>
+        <p:spPr>
+          <a:xfrm>
+            <a:off x="11213287" y="6473952"/>
+            <a:ext cx="219456" cy="87782"/>
+          </a:xfrm>
+          <a:prstGeom prst="wave">
+            <a:avLst/>
+          </a:prstGeom>
+          <a:solidFill>
+            <a:srgbClr val="98E1B1"/>
           </a:solidFill>
           <a:ln>
             <a:noFill/>
@@ -5032,8 +5449,8 @@
         </p:nvSpPr>
         <p:spPr>
           <a:xfrm>
-            <a:off x="640080" y="457200"/>
-            <a:ext cx="9722815" cy="868680"/>
+            <a:off x="640080" y="502920"/>
+            <a:ext cx="10911535" cy="914400"/>
           </a:xfrm>
         </p:spPr>
         <p:txBody>
@@ -5050,7 +5467,7 @@
             <a:r>
               <a:rPr sz="3000" b="1" i="0">
                 <a:solidFill>
-                  <a:srgbClr val="183A23"/>
+                  <a:srgbClr val="26231F"/>
                 </a:solidFill>
               </a:rPr>
               <a:t>우리 아기의 선택은?</a:t>
@@ -5060,14 +5477,14 @@
       </p:sp>
       <p:sp>
         <p:nvSpPr>
-          <p:cNvPr id="5" name="사진 자리"/>
+          <p:cNvPr id="7" name="사진 자리"/>
           <p:cNvSpPr/>
           <p:nvPr/>
         </p:nvSpPr>
         <p:spPr>
           <a:xfrm>
             <a:off x="640080" y="1600200"/>
-            <a:ext cx="4572000" cy="4800600"/>
+            <a:ext cx="4572000" cy="4572000"/>
           </a:xfrm>
           <a:prstGeom prst="roundRect">
             <a:avLst>
@@ -5075,12 +5492,10 @@
             </a:avLst>
           </a:prstGeom>
           <a:solidFill>
-            <a:srgbClr val="D2EFDC"/>
+            <a:srgbClr val="D5F6E0"/>
           </a:solidFill>
           <a:ln w="19050">
-            <a:solidFill>
-              <a:srgbClr val="29653D"/>
-            </a:solidFill>
+            <a:noFill/>
             <a:prstDash val="dash"/>
           </a:ln>
         </p:spPr>
@@ -5098,7 +5513,7 @@
             <a:r>
               <a:rPr sz="1400" b="0" i="0">
                 <a:solidFill>
-                  <a:srgbClr val="183A23"/>
+                  <a:srgbClr val="8E8780"/>
                 </a:solidFill>
               </a:rPr>
               <a:t>돌잡이 사진</a:t>
@@ -5108,26 +5523,26 @@
       </p:sp>
       <p:sp>
         <p:nvSpPr>
-          <p:cNvPr id="6" name="선택 칸"/>
+          <p:cNvPr id="8" name="선택 칸"/>
           <p:cNvSpPr/>
           <p:nvPr/>
         </p:nvSpPr>
         <p:spPr>
           <a:xfrm>
             <a:off x="5577840" y="1600200"/>
-            <a:ext cx="5973775" cy="4800600"/>
+            <a:ext cx="5973775" cy="4572000"/>
           </a:xfrm>
           <a:prstGeom prst="roundRect">
             <a:avLst>
-              <a:gd name="adj" fmla="val 8000"/>
+              <a:gd name="adj" fmla="val 3000"/>
             </a:avLst>
           </a:prstGeom>
           <a:solidFill>
-            <a:srgbClr val="F1F9F3"/>
+            <a:srgbClr val="FFFFFF"/>
           </a:solidFill>
-          <a:ln w="12700">
+          <a:ln w="9525">
             <a:solidFill>
-              <a:srgbClr val="D2EFDC"/>
+              <a:srgbClr val="D5F6E0"/>
             </a:solidFill>
           </a:ln>
         </p:spPr>
@@ -5141,14 +5556,43 @@
       </p:sp>
       <p:sp>
         <p:nvSpPr>
-          <p:cNvPr id="7" name="TextBox 6"/>
+          <p:cNvPr id="9" name="위쪽 띠"/>
+          <p:cNvSpPr/>
+          <p:nvPr/>
+        </p:nvSpPr>
+        <p:spPr>
+          <a:xfrm>
+            <a:off x="5586984" y="1609344"/>
+            <a:ext cx="5955487" cy="82296"/>
+          </a:xfrm>
+          <a:prstGeom prst="rect">
+            <a:avLst/>
+          </a:prstGeom>
+          <a:solidFill>
+            <a:srgbClr val="98E1B1"/>
+          </a:solidFill>
+          <a:ln>
+            <a:noFill/>
+          </a:ln>
+        </p:spPr>
+        <p:txBody>
+          <a:bodyPr rtlCol="0" anchor="ctr"/>
+          <a:lstStyle/>
+          <a:p>
+            <a:pPr algn="ctr"/>
+          </a:p>
+        </p:txBody>
+      </p:sp>
+      <p:sp>
+        <p:nvSpPr>
+          <p:cNvPr id="10" name="TextBox 9"/>
           <p:cNvSpPr txBox="1"/>
           <p:nvPr/>
         </p:nvSpPr>
         <p:spPr>
           <a:xfrm>
             <a:off x="5852160" y="1874519"/>
-            <a:ext cx="5425135" cy="4251960"/>
+            <a:ext cx="5425135" cy="4023360"/>
           </a:xfrm>
           <a:prstGeom prst="rect">
             <a:avLst/>
@@ -5169,7 +5613,7 @@
             <a:r>
               <a:rPr sz="1800" b="0" i="0">
                 <a:solidFill>
-                  <a:srgbClr val="2B2B2B"/>
+                  <a:srgbClr val="26231F"/>
                 </a:solidFill>
               </a:rPr>
               <a:t>우리 아기의 선택</a:t>
@@ -5184,7 +5628,7 @@
             <a:r>
               <a:rPr sz="1800" b="0" i="0">
                 <a:solidFill>
-                  <a:srgbClr val="2B2B2B"/>
+                  <a:srgbClr val="26231F"/>
                 </a:solidFill>
               </a:rPr>
               <a:t/>
@@ -5199,7 +5643,7 @@
             <a:r>
               <a:rPr sz="1800" b="0" i="0">
                 <a:solidFill>
-                  <a:srgbClr val="2B2B2B"/>
+                  <a:srgbClr val="26231F"/>
                 </a:solidFill>
               </a:rPr>
               <a:t>무엇을 집었나요?</a:t>
@@ -5214,7 +5658,7 @@
             <a:r>
               <a:rPr sz="1800" b="0" i="0">
                 <a:solidFill>
-                  <a:srgbClr val="2B2B2B"/>
+                  <a:srgbClr val="26231F"/>
                 </a:solidFill>
               </a:rPr>
               <a:t/>
@@ -5229,7 +5673,7 @@
             <a:r>
               <a:rPr sz="1800" b="0" i="0">
                 <a:solidFill>
-                  <a:srgbClr val="2B2B2B"/>
+                  <a:srgbClr val="26231F"/>
                 </a:solidFill>
               </a:rPr>
               <a:t>그때 가족의 반응은?</a:t>
@@ -5271,14 +5715,14 @@
         </p:nvSpPr>
         <p:spPr>
           <a:xfrm>
-            <a:off x="9905695" y="-1463040"/>
-            <a:ext cx="3840480" cy="3840480"/>
-          </a:xfrm>
-          <a:prstGeom prst="ellipse">
+            <a:off x="0" y="6565392"/>
+            <a:ext cx="12191695" cy="292608"/>
+          </a:xfrm>
+          <a:prstGeom prst="rect">
             <a:avLst/>
           </a:prstGeom>
           <a:solidFill>
-            <a:srgbClr val="D2EFDC"/>
+            <a:srgbClr val="ADEBC2"/>
           </a:solidFill>
           <a:ln>
             <a:noFill/>
@@ -5300,14 +5744,81 @@
         </p:nvSpPr>
         <p:spPr>
           <a:xfrm>
-            <a:off x="11094415" y="274320"/>
-            <a:ext cx="411480" cy="411480"/>
-          </a:xfrm>
-          <a:prstGeom prst="ellipse">
+            <a:off x="640080" y="6400800"/>
+            <a:ext cx="10911535" cy="10972"/>
+          </a:xfrm>
+          <a:prstGeom prst="rect">
             <a:avLst/>
           </a:prstGeom>
           <a:solidFill>
-            <a:srgbClr val="29653D"/>
+            <a:srgbClr val="26231F"/>
+          </a:solidFill>
+          <a:ln>
+            <a:noFill/>
+          </a:ln>
+        </p:spPr>
+        <p:txBody>
+          <a:bodyPr rtlCol="0" anchor="ctr"/>
+          <a:lstStyle/>
+          <a:p>
+            <a:pPr algn="ctr"/>
+          </a:p>
+        </p:txBody>
+      </p:sp>
+      <p:sp>
+        <p:nvSpPr>
+          <p:cNvPr id="5" name="하단 라벨"/>
+          <p:cNvSpPr txBox="1"/>
+          <p:nvPr/>
+        </p:nvSpPr>
+        <p:spPr>
+          <a:xfrm>
+            <a:off x="640080" y="6437376"/>
+            <a:ext cx="5486400" cy="274320"/>
+          </a:xfrm>
+          <a:prstGeom prst="rect">
+            <a:avLst/>
+          </a:prstGeom>
+          <a:noFill/>
+        </p:spPr>
+        <p:txBody>
+          <a:bodyPr wrap="square" lIns="54864" rIns="54864" tIns="27432" bIns="27432" anchor="ctr">
+            <a:noAutofit/>
+          </a:bodyPr>
+          <a:lstStyle/>
+          <a:p>
+            <a:pPr algn="l">
+              <a:lnSpc>
+                <a:spcPct val="115000"/>
+              </a:lnSpc>
+            </a:pPr>
+            <a:r>
+              <a:rPr sz="900" b="1" i="0" spc="250">
+                <a:solidFill>
+                  <a:srgbClr val="26231F"/>
+                </a:solidFill>
+              </a:rPr>
+              <a:t>FIRST BIRTHDAY</a:t>
+            </a:r>
+          </a:p>
+        </p:txBody>
+      </p:sp>
+      <p:sp>
+        <p:nvSpPr>
+          <p:cNvPr id="6" name="포인트"/>
+          <p:cNvSpPr/>
+          <p:nvPr/>
+        </p:nvSpPr>
+        <p:spPr>
+          <a:xfrm>
+            <a:off x="11213287" y="6473952"/>
+            <a:ext cx="219456" cy="87782"/>
+          </a:xfrm>
+          <a:prstGeom prst="wave">
+            <a:avLst/>
+          </a:prstGeom>
+          <a:solidFill>
+            <a:srgbClr val="98E1B1"/>
           </a:solidFill>
           <a:ln>
             <a:noFill/>
@@ -5333,8 +5844,8 @@
         </p:nvSpPr>
         <p:spPr>
           <a:xfrm>
-            <a:off x="640080" y="457200"/>
-            <a:ext cx="9722815" cy="868680"/>
+            <a:off x="640080" y="502920"/>
+            <a:ext cx="10911535" cy="914400"/>
           </a:xfrm>
         </p:spPr>
         <p:txBody>
@@ -5351,7 +5862,7 @@
             <a:r>
               <a:rPr sz="3000" b="1" i="0">
                 <a:solidFill>
-                  <a:srgbClr val="183A23"/>
+                  <a:srgbClr val="26231F"/>
                 </a:solidFill>
               </a:rPr>
               <a:t>사진 모음</a:t>
@@ -5361,14 +5872,14 @@
       </p:sp>
       <p:sp>
         <p:nvSpPr>
-          <p:cNvPr id="5" name="사진 자리"/>
+          <p:cNvPr id="7" name="사진 자리"/>
           <p:cNvSpPr/>
           <p:nvPr/>
         </p:nvSpPr>
         <p:spPr>
           <a:xfrm>
             <a:off x="640080" y="1600200"/>
-            <a:ext cx="2590723" cy="2308860"/>
+            <a:ext cx="2590723" cy="2194560"/>
           </a:xfrm>
           <a:prstGeom prst="roundRect">
             <a:avLst>
@@ -5376,12 +5887,10 @@
             </a:avLst>
           </a:prstGeom>
           <a:solidFill>
-            <a:srgbClr val="D2EFDC"/>
+            <a:srgbClr val="D5F6E0"/>
           </a:solidFill>
           <a:ln w="19050">
-            <a:solidFill>
-              <a:srgbClr val="29653D"/>
-            </a:solidFill>
+            <a:noFill/>
             <a:prstDash val="dash"/>
           </a:ln>
         </p:spPr>
@@ -5399,7 +5908,7 @@
             <a:r>
               <a:rPr sz="1200" b="0" i="0">
                 <a:solidFill>
-                  <a:srgbClr val="183A23"/>
+                  <a:srgbClr val="8E8780"/>
                 </a:solidFill>
               </a:rPr>
               <a:t>사진 1</a:t>
@@ -5409,14 +5918,14 @@
       </p:sp>
       <p:sp>
         <p:nvSpPr>
-          <p:cNvPr id="6" name="사진 자리"/>
+          <p:cNvPr id="8" name="사진 자리"/>
           <p:cNvSpPr/>
           <p:nvPr/>
         </p:nvSpPr>
         <p:spPr>
           <a:xfrm>
             <a:off x="3413683" y="1600200"/>
-            <a:ext cx="2590723" cy="2308860"/>
+            <a:ext cx="2590723" cy="2194560"/>
           </a:xfrm>
           <a:prstGeom prst="roundRect">
             <a:avLst>
@@ -5424,12 +5933,10 @@
             </a:avLst>
           </a:prstGeom>
           <a:solidFill>
-            <a:srgbClr val="D2EFDC"/>
+            <a:srgbClr val="D5F6E0"/>
           </a:solidFill>
           <a:ln w="19050">
-            <a:solidFill>
-              <a:srgbClr val="29653D"/>
-            </a:solidFill>
+            <a:noFill/>
             <a:prstDash val="dash"/>
           </a:ln>
         </p:spPr>
@@ -5447,7 +5954,7 @@
             <a:r>
               <a:rPr sz="1200" b="0" i="0">
                 <a:solidFill>
-                  <a:srgbClr val="183A23"/>
+                  <a:srgbClr val="8E8780"/>
                 </a:solidFill>
               </a:rPr>
               <a:t>사진 2</a:t>
@@ -5457,14 +5964,14 @@
       </p:sp>
       <p:sp>
         <p:nvSpPr>
-          <p:cNvPr id="7" name="사진 자리"/>
+          <p:cNvPr id="9" name="사진 자리"/>
           <p:cNvSpPr/>
           <p:nvPr/>
         </p:nvSpPr>
         <p:spPr>
           <a:xfrm>
             <a:off x="6187287" y="1600200"/>
-            <a:ext cx="2590723" cy="2308860"/>
+            <a:ext cx="2590723" cy="2194560"/>
           </a:xfrm>
           <a:prstGeom prst="roundRect">
             <a:avLst>
@@ -5472,12 +5979,10 @@
             </a:avLst>
           </a:prstGeom>
           <a:solidFill>
-            <a:srgbClr val="D2EFDC"/>
+            <a:srgbClr val="D5F6E0"/>
           </a:solidFill>
           <a:ln w="19050">
-            <a:solidFill>
-              <a:srgbClr val="29653D"/>
-            </a:solidFill>
+            <a:noFill/>
             <a:prstDash val="dash"/>
           </a:ln>
         </p:spPr>
@@ -5495,7 +6000,7 @@
             <a:r>
               <a:rPr sz="1200" b="0" i="0">
                 <a:solidFill>
-                  <a:srgbClr val="183A23"/>
+                  <a:srgbClr val="8E8780"/>
                 </a:solidFill>
               </a:rPr>
               <a:t>사진 3</a:t>
@@ -5505,14 +6010,14 @@
       </p:sp>
       <p:sp>
         <p:nvSpPr>
-          <p:cNvPr id="8" name="사진 자리"/>
+          <p:cNvPr id="10" name="사진 자리"/>
           <p:cNvSpPr/>
           <p:nvPr/>
         </p:nvSpPr>
         <p:spPr>
           <a:xfrm>
             <a:off x="8960891" y="1600200"/>
-            <a:ext cx="2590723" cy="2308860"/>
+            <a:ext cx="2590723" cy="2194560"/>
           </a:xfrm>
           <a:prstGeom prst="roundRect">
             <a:avLst>
@@ -5520,12 +6025,10 @@
             </a:avLst>
           </a:prstGeom>
           <a:solidFill>
-            <a:srgbClr val="D2EFDC"/>
+            <a:srgbClr val="D5F6E0"/>
           </a:solidFill>
           <a:ln w="19050">
-            <a:solidFill>
-              <a:srgbClr val="29653D"/>
-            </a:solidFill>
+            <a:noFill/>
             <a:prstDash val="dash"/>
           </a:ln>
         </p:spPr>
@@ -5543,7 +6046,7 @@
             <a:r>
               <a:rPr sz="1200" b="0" i="0">
                 <a:solidFill>
-                  <a:srgbClr val="183A23"/>
+                  <a:srgbClr val="8E8780"/>
                 </a:solidFill>
               </a:rPr>
               <a:t>사진 4</a:t>
@@ -5553,14 +6056,14 @@
       </p:sp>
       <p:sp>
         <p:nvSpPr>
-          <p:cNvPr id="9" name="사진 자리"/>
+          <p:cNvPr id="11" name="사진 자리"/>
           <p:cNvSpPr/>
           <p:nvPr/>
         </p:nvSpPr>
         <p:spPr>
           <a:xfrm>
-            <a:off x="640080" y="4091939"/>
-            <a:ext cx="2590723" cy="2308860"/>
+            <a:off x="640080" y="3977639"/>
+            <a:ext cx="2590723" cy="2194560"/>
           </a:xfrm>
           <a:prstGeom prst="roundRect">
             <a:avLst>
@@ -5568,12 +6071,10 @@
             </a:avLst>
           </a:prstGeom>
           <a:solidFill>
-            <a:srgbClr val="D2EFDC"/>
+            <a:srgbClr val="D5F6E0"/>
           </a:solidFill>
           <a:ln w="19050">
-            <a:solidFill>
-              <a:srgbClr val="29653D"/>
-            </a:solidFill>
+            <a:noFill/>
             <a:prstDash val="dash"/>
           </a:ln>
         </p:spPr>
@@ -5591,7 +6092,7 @@
             <a:r>
               <a:rPr sz="1200" b="0" i="0">
                 <a:solidFill>
-                  <a:srgbClr val="183A23"/>
+                  <a:srgbClr val="8E8780"/>
                 </a:solidFill>
               </a:rPr>
               <a:t>사진 5</a:t>
@@ -5601,14 +6102,14 @@
       </p:sp>
       <p:sp>
         <p:nvSpPr>
-          <p:cNvPr id="10" name="사진 자리"/>
+          <p:cNvPr id="12" name="사진 자리"/>
           <p:cNvSpPr/>
           <p:nvPr/>
         </p:nvSpPr>
         <p:spPr>
           <a:xfrm>
-            <a:off x="3413683" y="4091939"/>
-            <a:ext cx="2590723" cy="2308860"/>
+            <a:off x="3413683" y="3977639"/>
+            <a:ext cx="2590723" cy="2194560"/>
           </a:xfrm>
           <a:prstGeom prst="roundRect">
             <a:avLst>
@@ -5616,12 +6117,10 @@
             </a:avLst>
           </a:prstGeom>
           <a:solidFill>
-            <a:srgbClr val="D2EFDC"/>
+            <a:srgbClr val="D5F6E0"/>
           </a:solidFill>
           <a:ln w="19050">
-            <a:solidFill>
-              <a:srgbClr val="29653D"/>
-            </a:solidFill>
+            <a:noFill/>
             <a:prstDash val="dash"/>
           </a:ln>
         </p:spPr>
@@ -5639,7 +6138,7 @@
             <a:r>
               <a:rPr sz="1200" b="0" i="0">
                 <a:solidFill>
-                  <a:srgbClr val="183A23"/>
+                  <a:srgbClr val="8E8780"/>
                 </a:solidFill>
               </a:rPr>
               <a:t>사진 6</a:t>
@@ -5649,14 +6148,14 @@
       </p:sp>
       <p:sp>
         <p:nvSpPr>
-          <p:cNvPr id="11" name="사진 자리"/>
+          <p:cNvPr id="13" name="사진 자리"/>
           <p:cNvSpPr/>
           <p:nvPr/>
         </p:nvSpPr>
         <p:spPr>
           <a:xfrm>
-            <a:off x="6187287" y="4091939"/>
-            <a:ext cx="2590723" cy="2308860"/>
+            <a:off x="6187287" y="3977639"/>
+            <a:ext cx="2590723" cy="2194560"/>
           </a:xfrm>
           <a:prstGeom prst="roundRect">
             <a:avLst>
@@ -5664,12 +6163,10 @@
             </a:avLst>
           </a:prstGeom>
           <a:solidFill>
-            <a:srgbClr val="D2EFDC"/>
+            <a:srgbClr val="D5F6E0"/>
           </a:solidFill>
           <a:ln w="19050">
-            <a:solidFill>
-              <a:srgbClr val="29653D"/>
-            </a:solidFill>
+            <a:noFill/>
             <a:prstDash val="dash"/>
           </a:ln>
         </p:spPr>
@@ -5687,7 +6184,7 @@
             <a:r>
               <a:rPr sz="1200" b="0" i="0">
                 <a:solidFill>
-                  <a:srgbClr val="183A23"/>
+                  <a:srgbClr val="8E8780"/>
                 </a:solidFill>
               </a:rPr>
               <a:t>사진 7</a:t>
@@ -5697,14 +6194,14 @@
       </p:sp>
       <p:sp>
         <p:nvSpPr>
-          <p:cNvPr id="12" name="사진 자리"/>
+          <p:cNvPr id="14" name="사진 자리"/>
           <p:cNvSpPr/>
           <p:nvPr/>
         </p:nvSpPr>
         <p:spPr>
           <a:xfrm>
-            <a:off x="8960891" y="4091939"/>
-            <a:ext cx="2590723" cy="2308860"/>
+            <a:off x="8960891" y="3977639"/>
+            <a:ext cx="2590723" cy="2194560"/>
           </a:xfrm>
           <a:prstGeom prst="roundRect">
             <a:avLst>
@@ -5712,12 +6209,10 @@
             </a:avLst>
           </a:prstGeom>
           <a:solidFill>
-            <a:srgbClr val="D2EFDC"/>
+            <a:srgbClr val="D5F6E0"/>
           </a:solidFill>
           <a:ln w="19050">
-            <a:solidFill>
-              <a:srgbClr val="29653D"/>
-            </a:solidFill>
+            <a:noFill/>
             <a:prstDash val="dash"/>
           </a:ln>
         </p:spPr>
@@ -5735,7 +6230,7 @@
             <a:r>
               <a:rPr sz="1200" b="0" i="0">
                 <a:solidFill>
-                  <a:srgbClr val="183A23"/>
+                  <a:srgbClr val="8E8780"/>
                 </a:solidFill>
               </a:rPr>
               <a:t>사진 8</a:t>
@@ -5754,6 +6249,14 @@
 <file path=ppt/slides/slide6.xml><?xml version="1.0" encoding="utf-8"?>
 <p:sld xmlns:a="http://schemas.openxmlformats.org/drawingml/2006/main" xmlns:p="http://schemas.openxmlformats.org/presentationml/2006/main" xmlns:r="http://schemas.openxmlformats.org/officeDocument/2006/relationships">
   <p:cSld>
+    <p:bg>
+      <p:bgPr>
+        <a:solidFill>
+          <a:srgbClr val="D5F6E0"/>
+        </a:solidFill>
+        <a:effectLst/>
+      </p:bgPr>
+    </p:bg>
     <p:spTree>
       <p:nvGrpSpPr>
         <p:cNvPr id="1" name=""/>
@@ -5761,30 +6264,116 @@
         <p:nvPr/>
       </p:nvGrpSpPr>
       <p:grpSpPr/>
-      <p:pic>
-        <p:nvPicPr>
-          <p:cNvPr id="3" name="표지 그림" descr="birthday-47.jpg"/>
-          <p:cNvPicPr>
-            <a:picLocks noChangeAspect="1"/>
-          </p:cNvPicPr>
+      <p:sp>
+        <p:nvSpPr>
+          <p:cNvPr id="3" name="사진 자리"/>
+          <p:cNvSpPr/>
           <p:nvPr/>
-        </p:nvPicPr>
-        <p:blipFill>
-          <a:blip r:embed="rId2"/>
-          <a:stretch>
-            <a:fillRect/>
-          </a:stretch>
-        </p:blipFill>
-        <p:spPr>
-          <a:xfrm>
-            <a:off x="0" y="0"/>
-            <a:ext cx="12191695" cy="6858000"/>
+        </p:nvSpPr>
+        <p:spPr>
+          <a:xfrm>
+            <a:off x="7802684" y="0"/>
+            <a:ext cx="4389010" cy="6858000"/>
           </a:xfrm>
           <a:prstGeom prst="rect">
             <a:avLst/>
           </a:prstGeom>
-        </p:spPr>
-      </p:pic>
+          <a:solidFill>
+            <a:srgbClr val="ADEBC2"/>
+          </a:solidFill>
+          <a:ln>
+            <a:noFill/>
+          </a:ln>
+        </p:spPr>
+        <p:txBody>
+          <a:bodyPr rtlCol="0" anchor="ctr" wrap="square" lIns="54864" rIns="54864" tIns="27432" bIns="27432">
+            <a:noAutofit/>
+          </a:bodyPr>
+          <a:lstStyle/>
+          <a:p>
+            <a:pPr algn="ctr">
+              <a:lnSpc>
+                <a:spcPct val="100000"/>
+              </a:lnSpc>
+            </a:pPr>
+            <a:r>
+              <a:rPr sz="1400" b="0" i="0">
+                <a:solidFill>
+                  <a:srgbClr val="274932"/>
+                </a:solidFill>
+              </a:rPr>
+              <a:t>사진을 넣어 주세요</a:t>
+            </a:r>
+          </a:p>
+        </p:txBody>
+      </p:sp>
+      <p:sp>
+        <p:nvSpPr>
+          <p:cNvPr id="4" name="장식"/>
+          <p:cNvSpPr/>
+          <p:nvPr/>
+        </p:nvSpPr>
+        <p:spPr>
+          <a:xfrm>
+            <a:off x="8168435" y="365760"/>
+            <a:ext cx="3657508" cy="6126480"/>
+          </a:xfrm>
+          <a:prstGeom prst="rect">
+            <a:avLst/>
+          </a:prstGeom>
+          <a:noFill/>
+          <a:ln w="9525">
+            <a:solidFill>
+              <a:srgbClr val="26231F"/>
+            </a:solidFill>
+          </a:ln>
+        </p:spPr>
+        <p:txBody>
+          <a:bodyPr rtlCol="0" anchor="ctr"/>
+          <a:lstStyle/>
+          <a:p>
+            <a:pPr algn="ctr"/>
+          </a:p>
+        </p:txBody>
+      </p:sp>
+      <p:sp>
+        <p:nvSpPr>
+          <p:cNvPr id="5" name="라벨"/>
+          <p:cNvSpPr txBox="1"/>
+          <p:nvPr/>
+        </p:nvSpPr>
+        <p:spPr>
+          <a:xfrm>
+            <a:off x="822960" y="2148840"/>
+            <a:ext cx="5608179" cy="274320"/>
+          </a:xfrm>
+          <a:prstGeom prst="rect">
+            <a:avLst/>
+          </a:prstGeom>
+          <a:noFill/>
+        </p:spPr>
+        <p:txBody>
+          <a:bodyPr wrap="square" lIns="54864" rIns="54864" tIns="27432" bIns="27432" anchor="t">
+            <a:noAutofit/>
+          </a:bodyPr>
+          <a:lstStyle/>
+          <a:p>
+            <a:pPr algn="l">
+              <a:lnSpc>
+                <a:spcPct val="115000"/>
+              </a:lnSpc>
+            </a:pPr>
+            <a:r>
+              <a:rPr sz="1000" b="1" i="0" spc="250">
+                <a:solidFill>
+                  <a:srgbClr val="26231F"/>
+                </a:solidFill>
+              </a:rPr>
+              <a:t>FIRST BIRTHDAY</a:t>
+            </a:r>
+          </a:p>
+        </p:txBody>
+      </p:sp>
       <p:sp>
         <p:nvSpPr>
           <p:cNvPr id="2" name="Title 1"/>
@@ -5797,8 +6386,8 @@
         </p:nvSpPr>
         <p:spPr>
           <a:xfrm>
-            <a:off x="853418" y="2057400"/>
-            <a:ext cx="6095847" cy="1554480"/>
+            <a:off x="822960" y="2606040"/>
+            <a:ext cx="5608179" cy="1188720"/>
           </a:xfrm>
         </p:spPr>
         <p:txBody>
@@ -5815,7 +6404,7 @@
             <a:r>
               <a:rPr sz="3400" b="1" i="0">
                 <a:solidFill>
-                  <a:srgbClr val="183A23"/>
+                  <a:srgbClr val="26231F"/>
                 </a:solidFill>
               </a:rPr>
               <a:t>와 주셔서 고맙습니다</a:t>
@@ -5825,14 +6414,14 @@
       </p:sp>
       <p:sp>
         <p:nvSpPr>
-          <p:cNvPr id="4" name="한 줄 문구"/>
+          <p:cNvPr id="6" name="한 줄 문구"/>
           <p:cNvSpPr txBox="1"/>
           <p:nvPr/>
         </p:nvSpPr>
         <p:spPr>
           <a:xfrm>
-            <a:off x="853418" y="3749039"/>
-            <a:ext cx="6095847" cy="822960"/>
+            <a:off x="822960" y="3886200"/>
+            <a:ext cx="5608179" cy="822960"/>
           </a:xfrm>
           <a:prstGeom prst="rect">
             <a:avLst/>
@@ -5851,9 +6440,9 @@
               </a:lnSpc>
             </a:pPr>
             <a:r>
-              <a:rPr sz="1700" b="0" i="1">
+              <a:rPr sz="1700" b="0" i="0">
                 <a:solidFill>
-                  <a:srgbClr val="183A23"/>
+                  <a:srgbClr val="26231F"/>
                 </a:solidFill>
               </a:rPr>
               <a:t>아이가 한 살이 되었습니다</a:t>
@@ -5863,14 +6452,14 @@
       </p:sp>
       <p:sp>
         <p:nvSpPr>
-          <p:cNvPr id="5" name="안내 문구"/>
+          <p:cNvPr id="7" name="안내 문구"/>
           <p:cNvSpPr txBox="1"/>
           <p:nvPr/>
         </p:nvSpPr>
         <p:spPr>
           <a:xfrm>
-            <a:off x="853418" y="4617720"/>
-            <a:ext cx="6095847" cy="914400"/>
+            <a:off x="822960" y="4754880"/>
+            <a:ext cx="5608179" cy="914400"/>
           </a:xfrm>
           <a:prstGeom prst="rect">
             <a:avLst/>
@@ -5891,7 +6480,7 @@
             <a:r>
               <a:rPr sz="1400" b="0" i="0">
                 <a:solidFill>
-                  <a:srgbClr val="666666"/>
+                  <a:srgbClr val="26231F"/>
                 </a:solidFill>
               </a:rPr>
               <a:t>아기 이름 · 부모 이름</a:t>
@@ -5918,34 +6507,34 @@
         <a:sysClr val="window" lastClr="FFFFFF"/>
       </a:lt1>
       <a:dk2>
-        <a:srgbClr val="183A23"/>
+        <a:srgbClr val="274932"/>
       </a:dk2>
       <a:lt2>
-        <a:srgbClr val="F1F9F3"/>
+        <a:srgbClr val="ECFBF1"/>
       </a:lt2>
       <a:accent1>
-        <a:srgbClr val="29653D"/>
+        <a:srgbClr val="98E1B1"/>
       </a:accent1>
       <a:accent2>
-        <a:srgbClr val="833B91"/>
+        <a:srgbClr val="B8EAE0"/>
       </a:accent2>
       <a:accent3>
-        <a:srgbClr val="183A23"/>
+        <a:srgbClr val="274932"/>
       </a:accent3>
       <a:accent4>
-        <a:srgbClr val="D2EFDC"/>
+        <a:srgbClr val="D5F6E0"/>
       </a:accent4>
       <a:accent5>
-        <a:srgbClr val="565067"/>
+        <a:srgbClr val="A8E6C8"/>
       </a:accent5>
       <a:accent6>
-        <a:srgbClr val="74897B"/>
+        <a:srgbClr val="7D9284"/>
       </a:accent6>
       <a:hlink>
-        <a:srgbClr val="29653D"/>
+        <a:srgbClr val="98E1B1"/>
       </a:hlink>
       <a:folHlink>
-        <a:srgbClr val="183A23"/>
+        <a:srgbClr val="274932"/>
       </a:folHlink>
     </a:clrScheme>
     <a:fontScheme name="Office">
